--- a/it/slides/21-Architettura_dei_Calcolatori-Ingresso_Uscita-Codice.pptx
+++ b/it/slides/21-Architettura_dei_Calcolatori-Ingresso_Uscita-Codice.pptx
@@ -118,25 +118,25 @@
   <p:extLst>
     <p:ext uri="{521415D9-36F7-43E2-AB2F-B90AF26B5E84}">
       <p14:sectionLst xmlns:p14="http://schemas.microsoft.com/office/powerpoint/2010/main">
-        <p14:section name="Apertura" id="{0a262077-1766-f98b-8ffb-12068cc58cda}">
+        <p14:section name="Apertura" id="{6333a473-6902-e5dc-8b6c-b20d581d67b0}">
           <p14:sldIdLst>
             <p14:sldId id="256"/>
             <p14:sldId id="257"/>
           </p14:sldIdLst>
         </p14:section>
-        <p14:section name="I listati" id="{19d4619a-6d3d-b275-c829-90a06493231d}">
+        <p14:section name="Riscaldamento sulla macchina" id="{9ff6e5d0-acd7-299c-71a3-e3293a3d0d57}">
           <p14:sldIdLst>
             <p14:sldId id="258"/>
           </p14:sldIdLst>
         </p14:section>
-        <p14:section name="Il programma completo" id="{4d2f59fa-e425-a3b9-ada7-7edf7474d880}">
+        <p14:section name="Il programma completo" id="{6a0e6daa-5d48-b0e2-7b24-a1950edf48a7}">
           <p14:sldIdLst>
             <p14:sldId id="259"/>
             <p14:sldId id="260"/>
             <p14:sldId id="261"/>
           </p14:sldIdLst>
         </p14:section>
-        <p14:section name="Eseguire e provare" id="{d93693cb-d673-0e2a-6942-8a6ab091d83b}">
+        <p14:section name="Eseguire e provare" id="{31d30608-cabd-c54c-cb84-3f25b167a419}">
           <p14:sldIdLst>
             <p14:sldId id="262"/>
             <p14:sldId id="263"/>
@@ -145,7 +145,7 @@
             <p14:sldId id="266"/>
           </p14:sldIdLst>
         </p14:section>
-        <p14:section name="Esercizi" id="{825cc533-43b5-37ae-36f8-794d4b1e8aff}">
+        <p14:section name="Esercizi" id="{69bb62eb-e06a-66e0-e17d-fc8749dcce27}">
           <p14:sldIdLst>
             <p14:sldId id="267"/>
           </p14:sldIdLst>
@@ -2507,7 +2507,63 @@
       </p:sp>
       <p:sp>
         <p:nvSpPr>
-          <p:cNvPr id="11" name="Shape 9"/>
+          <p:cNvPr id="11" name="Text 9"/>
+          <p:cNvSpPr txBox="1"/>
+          <p:nvPr/>
+        </p:nvSpPr>
+        <p:spPr>
+          <a:xfrm>
+            <a:off x="4693615" y="566928"/>
+            <a:ext cx="6949440" cy="640080"/>
+          </a:xfrm>
+          <a:prstGeom prst="rect">
+            <a:avLst/>
+          </a:prstGeom>
+          <a:noFill/>
+          <a:ln/>
+        </p:spPr>
+        <p:txBody>
+          <a:bodyPr wrap="square" lIns="0" tIns="0" rIns="0" bIns="0" rtlCol="0" anchor="t"/>
+          <a:lstStyle/>
+          <a:p>
+            <a:pPr algn="r" indent="0" marL="0">
+              <a:buNone/>
+            </a:pPr>
+            <a:r>
+              <a:rPr lang="en-US" sz="1300" dirty="0">
+                <a:solidFill>
+                  <a:srgbClr val="CFE3EA"/>
+                </a:solidFill>
+                <a:latin typeface="Calibri" pitchFamily="34" charset="0"/>
+                <a:ea typeface="Calibri" pitchFamily="34" charset="-122"/>
+                <a:cs typeface="Calibri" pitchFamily="34" charset="-120"/>
+              </a:rPr>
+              <a:t>Presentazione del codice. I concetti, le figure e le domande sono nella presentazione della lezione:</a:t>
+            </a:r>
+            <a:endParaRPr lang="en-US" sz="1300" dirty="0"/>
+          </a:p>
+          <a:p>
+            <a:pPr algn="r" indent="0" marL="0">
+              <a:buNone/>
+            </a:pPr>
+            <a:r>
+              <a:rPr lang="en-US" sz="1300" dirty="0">
+                <a:solidFill>
+                  <a:srgbClr val="CFE3EA"/>
+                </a:solidFill>
+                <a:latin typeface="Calibri" pitchFamily="34" charset="0"/>
+                <a:ea typeface="Calibri" pitchFamily="34" charset="-122"/>
+                <a:cs typeface="Calibri" pitchFamily="34" charset="-120"/>
+              </a:rPr>
+              <a:t>21-Architettura_dei_Calcolatori-Ingresso_Uscita.pptx</a:t>
+            </a:r>
+            <a:endParaRPr lang="en-US" sz="1300" dirty="0"/>
+          </a:p>
+        </p:txBody>
+      </p:sp>
+      <p:sp>
+        <p:nvSpPr>
+          <p:cNvPr id="12" name="Shape 10"/>
           <p:cNvSpPr/>
           <p:nvPr/>
         </p:nvSpPr>
@@ -2534,7 +2590,7 @@
       </p:sp>
       <p:pic>
         <p:nvPicPr>
-          <p:cNvPr id="12" name="Image 0" descr="/Users/raffaelemontella/devel/riscv-prg32/computer-architecture-with-prg32/tools/assets/lab2_step1_lamps.png">    </p:cNvPr>
+          <p:cNvPr id="13" name="Image 0" descr="/Users/raffaelemontella/devel/riscv-prg32/computer-architecture-with-prg32/tools/assets/lab2_step1_lamps.png">    </p:cNvPr>
           <p:cNvPicPr>
             <a:picLocks noChangeAspect="1"/>
           </p:cNvPicPr>

--- a/it/slides/21-Architettura_dei_Calcolatori-Ingresso_Uscita-Codice.pptx
+++ b/it/slides/21-Architettura_dei_Calcolatori-Ingresso_Uscita-Codice.pptx
@@ -118,25 +118,25 @@
   <p:extLst>
     <p:ext uri="{521415D9-36F7-43E2-AB2F-B90AF26B5E84}">
       <p14:sectionLst xmlns:p14="http://schemas.microsoft.com/office/powerpoint/2010/main">
-        <p14:section name="Apertura" id="{6333a473-6902-e5dc-8b6c-b20d581d67b0}">
+        <p14:section name="Apertura" id="{f8f69b1a-0b7d-78b8-8fe2-4caf702b369a}">
           <p14:sldIdLst>
             <p14:sldId id="256"/>
             <p14:sldId id="257"/>
           </p14:sldIdLst>
         </p14:section>
-        <p14:section name="Riscaldamento sulla macchina" id="{9ff6e5d0-acd7-299c-71a3-e3293a3d0d57}">
+        <p14:section name="Riscaldamento sulla macchina" id="{9075a6ab-7b44-8c9d-2a20-a0367bd7c378}">
           <p14:sldIdLst>
             <p14:sldId id="258"/>
           </p14:sldIdLst>
         </p14:section>
-        <p14:section name="Il programma completo" id="{6a0e6daa-5d48-b0e2-7b24-a1950edf48a7}">
+        <p14:section name="Il programma completo" id="{04309fd7-e4e8-8385-d4ae-d1c65ccfa583}">
           <p14:sldIdLst>
             <p14:sldId id="259"/>
             <p14:sldId id="260"/>
             <p14:sldId id="261"/>
           </p14:sldIdLst>
         </p14:section>
-        <p14:section name="Eseguire e provare" id="{31d30608-cabd-c54c-cb84-3f25b167a419}">
+        <p14:section name="Eseguire e provare" id="{760ad609-fbe3-0ee4-ab7d-43607a14d036}">
           <p14:sldIdLst>
             <p14:sldId id="262"/>
             <p14:sldId id="263"/>
@@ -145,7 +145,7 @@
             <p14:sldId id="266"/>
           </p14:sldIdLst>
         </p14:section>
-        <p14:section name="Esercizi" id="{69bb62eb-e06a-66e0-e17d-fc8749dcce27}">
+        <p14:section name="Esercizi" id="{e774bfe7-2bd2-c5b2-92de-2207d70e4e10}">
           <p14:sldIdLst>
             <p14:sldId id="267"/>
           </p14:sldIdLst>
@@ -554,7 +554,9 @@
           <a:p>
             <a:r>
               <a:rPr lang="en-US" dirty="0"/>
-              <a:t>Questa è la presentazione del codice della Lezione 21. La presentazione della lezione contiene i concetti; questa contiene tutto ciò che si scrive e si esegue: i listati con la loro spiegazione, il programma completo, che cosa mostra, e il modo di provarlo su ciascuno dei tre host.</a:t>
+              <a:t>Questa è la presentazione del codice della Lezione 21. La presentazione della lezione contiene i concetti; questa contiene tutto ciò che si scrive e si esegue: i listati con la loro spiegazione, il programma completo, che cosa mostra, e il modo di provarlo su ciascuno dei tre host.
+Stato di apprendimento: DA COMPRENDERE OGGI, alla fine di questa lezione lo spiegate, lo seguite passo passo e lo applicate da soli; DA UTILIZZARE OGGI, oggi seguite e usate la ricetta; come funziona dentro si spiega più avanti, o non fa parte del corso; DA COMPRENDERE PIÙ AVANTI, riconoscete il nome e lo scopo; lo spiega una lezione successiva. Una slide senza etichetta è contesto: una storia, un esempio, una domanda, un esercizio.
+Stato di apprendimento di questa lezione. DA COMPRENDERE OGGI: polling, interruzioni, DMA; display CRT e LCD; tastiera e mouse; le stampanti. DA UTILIZZARE OGGI: il programma completo, gli strumenti di PRG32 (si usa, non si studia, in questo corso). DA COMPRENDERE PIÙ AVANTI: niente. Una slide senza etichetta è contesto: una storia, un esempio, una domanda, un esercizio.</a:t>
             </a:r>
             <a:endParaRPr lang="en-US" dirty="0"/>
           </a:p>
@@ -643,6 +645,7 @@
             <a:r>
               <a:rPr lang="en-US" dirty="0"/>
               <a:t>Lo stesso programma sul kit. Il firmware si scrive una volta, via USB; dopo, le cartucce viaggiano sul Wi-Fi. Il comando di caricamento è quello usato per PRG32-QT con l'indirizzo della scheda. È l'unico host che i test automatici non eseguono: provatelo, e riferite ciò che vedete.
+DA UTILIZZARE OGGI: gli strumenti di PRG32 (si usa, non si studia, in questo corso).
 Per il docente: Non eseguito dai test: sulla macchina di prova non c'è una scheda. La cartuccia per l'architettura esp32c6 è compilata dai test; i passi sono quelli della documentazione di PRG32. Se la porta seriale non viene trovata, passatela esplicitamente. Per usare il Wi-Fi dell'aula: python3 -m prg32 wifi set --ssid NOME --password PASSWORD --mode sta.</a:t>
             </a:r>
             <a:endParaRPr lang="en-US" dirty="0"/>
@@ -732,6 +735,7 @@
             <a:r>
               <a:rPr lang="en-US" dirty="0"/>
               <a:t>I cinque sintomi più comuni, che cosa significa ciascuno, e che cosa fare. Leggete il messaggio prima di cambiare qualcosa: quasi sempre nomina la causa.
+DA UTILIZZARE OGGI: gli strumenti di PRG32 (si usa, non si studia, in questo corso).
 Per il docente: Le prime tre righe coprono la maggior parte dei casi. Quando chiedete aiuto, incollate il comando e l'intero messaggio come testo. docs/usage/troubleshooting.md del repository di PRG32 ha l'elenco completo.</a:t>
             </a:r>
             <a:endParaRPr lang="en-US" dirty="0"/>
@@ -999,6 +1003,7 @@
             <a:r>
               <a:rPr lang="en-US" dirty="0"/>
               <a:t>Una funzione che legge l'ingresso una volta per frame. prg32_input_read restituisce in a0 una parola con un bit per pulsante; il codice la copia in s0, un registro salvato, perché la parola deve sopravvivere alla chiamata che suona una nota. Poi ogni pulsante viene esaminato con andi e una maschera: 0x10 per A, 0x01 per LEFT. Dietro ogni bit c'è un interruttore su un piedino di ingresso del chip. Il programma chiede, una volta per frame, e questo modo di procedere ha un nome: polling. Gli altri dispositivi sono meno semplici.
+DA COMPRENDERE OGGI: polling, interruzioni, DMA.
 Per il docente: Dal capitolo 6 del libro, dal laboratorio 06 e dall'esempio sonoro del capitolo finale (examples/asm_capstone/audio_note_event.S). Compilato come cartuccia ed eseguito sul runner headless di PRG32-QT (tools/tests): il marcatore si muove con LEFT anche mentre A suona la nota, perché la maschera è conservata in s0, un registro salvato; in t0 andrebbe persa alla chiamata. I piedini sono registri GPIO mappati in memoria (Lezione 15), configurati come ingressi, cioè con i buffer di uscita in alta impedenza (Lezione 14).</a:t>
             </a:r>
             <a:endParaRPr lang="en-US" dirty="0"/>
@@ -1088,6 +1093,7 @@
             <a:r>
               <a:rPr lang="en-US" dirty="0"/>
               <a:t>Una pagina del programma completo, esattamente com'è nel repository. Leggetelo dall'inizio: l'intestazione dice che cosa mostra il programma e come compilarlo; seguono le tre funzioni init, update e draw, poi i dati. Le righe incontrate nei listati della lezione hanno qui gli stessi commenti.
+DA UTILIZZARE OGGI: il programma completo (si usa, non si studia, in questo corso).
 Per il docente: code/l21.S, come viene compilato ed eseguito dai test. I commenti fanno parte del programma, e sono in inglese come in tutti i listati: leggeteli con il codice.</a:t>
             </a:r>
             <a:endParaRPr lang="en-US" dirty="0"/>
@@ -1177,6 +1183,7 @@
             <a:r>
               <a:rPr lang="en-US" dirty="0"/>
               <a:t>Una pagina del programma completo, esattamente com'è nel repository. Leggetelo dall'inizio: l'intestazione dice che cosa mostra il programma e come compilarlo; seguono le tre funzioni init, update e draw, poi i dati. Le righe incontrate nei listati della lezione hanno qui gli stessi commenti.
+DA UTILIZZARE OGGI: il programma completo (si usa, non si studia, in questo corso).
 Per il docente: code/l21.S, come viene compilato ed eseguito dai test. I commenti fanno parte del programma, e sono in inglese come in tutti i listati: leggeteli con il codice.</a:t>
             </a:r>
             <a:endParaRPr lang="en-US" dirty="0"/>
@@ -1266,6 +1273,7 @@
             <a:r>
               <a:rPr lang="en-US" dirty="0"/>
               <a:t>Una pagina del programma completo, esattamente com'è nel repository. Leggetelo dall'inizio: l'intestazione dice che cosa mostra il programma e come compilarlo; seguono le tre funzioni init, update e draw, poi i dati. Le righe incontrate nei listati della lezione hanno qui gli stessi commenti.
+DA UTILIZZARE OGGI: il programma completo (si usa, non si studia, in questo corso).
 Per il docente: code/l21.S, come viene compilato ed eseguito dai test. I commenti fanno parte del programma, e sono in inglese come in tutti i listati: leggeteli con il codice.</a:t>
             </a:r>
             <a:endParaRPr lang="en-US" dirty="0"/>
@@ -1444,6 +1452,7 @@
             <a:r>
               <a:rPr lang="en-US" dirty="0"/>
               <a:t>La via più rapida: PRG32-QT sul vostro computer. Quattro passi, ciascuno con il suo comando. PRG32-QT si comporta come una scheda sulla porta 8080, ed è per questo che il comando di caricamento dice esp32c6. Con la modalità debug abilitata potete fermarvi su qualsiasi istruzione e leggere registri e memoria.
+DA UTILIZZARE OGGI: gli strumenti di PRG32 (si usa, non si studia, in questo corso).
 Per il docente: Eseguito dai test: la cartuccia di questa slide è compilata con questo comando ed eseguita sull'esecutore senza interfaccia di PRG32-QT. Senza la toolchain: importate il file .prg32 in PRG32-QT e scegliete Run Cartridge. Tasti: frecce o WASD per il joystick, Z o J per A, X o K per B, Invio per Start, Esc per tornare a Setup.</a:t>
             </a:r>
             <a:endParaRPr lang="en-US" dirty="0"/>
@@ -1533,6 +1542,7 @@
             <a:r>
               <a:rPr lang="en-US" dirty="0"/>
               <a:t>Lo stesso programma sull'emulatore. QEMU esegue il firmware vero su un chip emulato, quindi la cartuccia va compilata per l'architettura qemu. Caricate la cartuccia mentre QEMU è chiuso. Il firmware si apre sul menu Setup: scegliete Run Cartridge e lo slot. Ricordate che la tastiera è letta dal terminale, non dalla finestra con l'immagine.
+DA UTILIZZARE OGGI: gli strumenti di PRG32 (si usa, non si studia, in questo corso).
 Per il docente: Verificato dai test fino al caricamento: la cartuccia è compilata per l'architettura qemu e accettata nell'immagine flash dell'emulatore. Ciò che l'emulatore poi mostra non è verificato automaticamente: il QEMU di Espressif ha bisogno della sua finestra. Dall'ottobre 2026 il firmware parte da Setup: scegliete Run Cartridge, poi cart0.</a:t>
             </a:r>
             <a:endParaRPr lang="en-US" dirty="0"/>
@@ -2614,6 +2624,420 @@
       </p:pic>
       <p:sp>
         <p:nvSpPr>
+          <p:cNvPr id="14" name="Shape 11"/>
+          <p:cNvSpPr/>
+          <p:nvPr/>
+        </p:nvSpPr>
+        <p:spPr>
+          <a:xfrm>
+            <a:off x="8910777" y="91440"/>
+            <a:ext cx="2732278" cy="274320"/>
+          </a:xfrm>
+          <a:prstGeom prst="rect">
+            <a:avLst/>
+          </a:prstGeom>
+          <a:solidFill>
+            <a:srgbClr val="F3E8FF"/>
+          </a:solidFill>
+          <a:ln w="12700">
+            <a:solidFill>
+              <a:srgbClr val="7E22CE"/>
+            </a:solidFill>
+            <a:prstDash val="dash"/>
+          </a:ln>
+        </p:spPr>
+      </p:sp>
+      <p:sp>
+        <p:nvSpPr>
+          <p:cNvPr id="15" name="Shape 12"/>
+          <p:cNvSpPr/>
+          <p:nvPr/>
+        </p:nvSpPr>
+        <p:spPr>
+          <a:xfrm>
+            <a:off x="8938209" y="128016"/>
+            <a:ext cx="45720" cy="45720"/>
+          </a:xfrm>
+          <a:prstGeom prst="rect">
+            <a:avLst/>
+          </a:prstGeom>
+          <a:solidFill>
+            <a:srgbClr val="7E22CE"/>
+          </a:solidFill>
+          <a:ln w="12700">
+            <a:solidFill>
+              <a:srgbClr val="7E22CE"/>
+            </a:solidFill>
+            <a:prstDash val="solid"/>
+          </a:ln>
+        </p:spPr>
+      </p:sp>
+      <p:sp>
+        <p:nvSpPr>
+          <p:cNvPr id="16" name="Shape 13"/>
+          <p:cNvSpPr/>
+          <p:nvPr/>
+        </p:nvSpPr>
+        <p:spPr>
+          <a:xfrm>
+            <a:off x="8938209" y="205740"/>
+            <a:ext cx="45720" cy="45720"/>
+          </a:xfrm>
+          <a:prstGeom prst="rect">
+            <a:avLst/>
+          </a:prstGeom>
+          <a:solidFill>
+            <a:srgbClr val="7E22CE"/>
+          </a:solidFill>
+          <a:ln w="12700">
+            <a:solidFill>
+              <a:srgbClr val="7E22CE"/>
+            </a:solidFill>
+            <a:prstDash val="solid"/>
+          </a:ln>
+        </p:spPr>
+      </p:sp>
+      <p:sp>
+        <p:nvSpPr>
+          <p:cNvPr id="17" name="Shape 14"/>
+          <p:cNvSpPr/>
+          <p:nvPr/>
+        </p:nvSpPr>
+        <p:spPr>
+          <a:xfrm>
+            <a:off x="8938209" y="283464"/>
+            <a:ext cx="45720" cy="45720"/>
+          </a:xfrm>
+          <a:prstGeom prst="rect">
+            <a:avLst/>
+          </a:prstGeom>
+          <a:solidFill>
+            <a:srgbClr val="7E22CE"/>
+          </a:solidFill>
+          <a:ln w="12700">
+            <a:solidFill>
+              <a:srgbClr val="7E22CE"/>
+            </a:solidFill>
+            <a:prstDash val="solid"/>
+          </a:ln>
+        </p:spPr>
+      </p:sp>
+      <p:pic>
+        <p:nvPicPr>
+          <p:cNvPr id="18" name="Image 1" descr="preencoded.png">    </p:cNvPr>
+          <p:cNvPicPr>
+            <a:picLocks noChangeAspect="1"/>
+          </p:cNvPicPr>
+          <p:nvPr/>
+        </p:nvPicPr>
+        <p:blipFill>
+          <a:blip r:embed="rId2"/>
+          <a:stretch>
+            <a:fillRect/>
+          </a:stretch>
+        </p:blipFill>
+        <p:spPr>
+          <a:xfrm>
+            <a:off x="9038793" y="128016"/>
+            <a:ext cx="201168" cy="201168"/>
+          </a:xfrm>
+          <a:prstGeom prst="rect">
+            <a:avLst/>
+          </a:prstGeom>
+        </p:spPr>
+      </p:pic>
+      <p:sp>
+        <p:nvSpPr>
+          <p:cNvPr id="19" name="Text 15"/>
+          <p:cNvSpPr txBox="1"/>
+          <p:nvPr/>
+        </p:nvSpPr>
+        <p:spPr>
+          <a:xfrm>
+            <a:off x="9294825" y="91440"/>
+            <a:ext cx="2311654" cy="274320"/>
+          </a:xfrm>
+          <a:prstGeom prst="rect">
+            <a:avLst/>
+          </a:prstGeom>
+          <a:noFill/>
+          <a:ln/>
+        </p:spPr>
+        <p:txBody>
+          <a:bodyPr wrap="square" lIns="0" tIns="0" rIns="0" bIns="0" rtlCol="0" anchor="ctr"/>
+          <a:lstStyle/>
+          <a:p>
+            <a:pPr indent="0" marL="0">
+              <a:buNone/>
+            </a:pPr>
+            <a:r>
+              <a:rPr lang="en-US" sz="1100" b="1" dirty="0">
+                <a:solidFill>
+                  <a:srgbClr val="6B21A8"/>
+                </a:solidFill>
+                <a:latin typeface="Calibri" pitchFamily="34" charset="0"/>
+                <a:ea typeface="Calibri" pitchFamily="34" charset="-122"/>
+                <a:cs typeface="Calibri" pitchFamily="34" charset="-120"/>
+              </a:rPr>
+              <a:t>DA COMPRENDERE PIÙ AVANTI</a:t>
+            </a:r>
+            <a:endParaRPr lang="en-US" sz="1100" dirty="0"/>
+          </a:p>
+        </p:txBody>
+      </p:sp>
+      <p:sp>
+        <p:nvSpPr>
+          <p:cNvPr id="20" name="Shape 16"/>
+          <p:cNvSpPr/>
+          <p:nvPr/>
+        </p:nvSpPr>
+        <p:spPr>
+          <a:xfrm>
+            <a:off x="6675069" y="91440"/>
+            <a:ext cx="2125980" cy="274320"/>
+          </a:xfrm>
+          <a:prstGeom prst="rect">
+            <a:avLst/>
+          </a:prstGeom>
+          <a:solidFill>
+            <a:srgbClr val="FEF3C7"/>
+          </a:solidFill>
+          <a:ln w="12700">
+            <a:solidFill>
+              <a:srgbClr val="B45309"/>
+            </a:solidFill>
+            <a:prstDash val="solid"/>
+          </a:ln>
+        </p:spPr>
+      </p:sp>
+      <p:sp>
+        <p:nvSpPr>
+          <p:cNvPr id="21" name="Shape 17"/>
+          <p:cNvSpPr/>
+          <p:nvPr/>
+        </p:nvSpPr>
+        <p:spPr>
+          <a:xfrm>
+            <a:off x="6675069" y="91440"/>
+            <a:ext cx="27432" cy="274320"/>
+          </a:xfrm>
+          <a:prstGeom prst="rect">
+            <a:avLst/>
+          </a:prstGeom>
+          <a:solidFill>
+            <a:srgbClr val="B45309"/>
+          </a:solidFill>
+          <a:ln w="12700">
+            <a:solidFill>
+              <a:srgbClr val="B45309"/>
+            </a:solidFill>
+            <a:prstDash val="solid"/>
+          </a:ln>
+        </p:spPr>
+      </p:sp>
+      <p:sp>
+        <p:nvSpPr>
+          <p:cNvPr id="22" name="Shape 18"/>
+          <p:cNvSpPr/>
+          <p:nvPr/>
+        </p:nvSpPr>
+        <p:spPr>
+          <a:xfrm>
+            <a:off x="6729933" y="91440"/>
+            <a:ext cx="27432" cy="274320"/>
+          </a:xfrm>
+          <a:prstGeom prst="rect">
+            <a:avLst/>
+          </a:prstGeom>
+          <a:solidFill>
+            <a:srgbClr val="B45309"/>
+          </a:solidFill>
+          <a:ln w="12700">
+            <a:solidFill>
+              <a:srgbClr val="B45309"/>
+            </a:solidFill>
+            <a:prstDash val="solid"/>
+          </a:ln>
+        </p:spPr>
+      </p:sp>
+      <p:pic>
+        <p:nvPicPr>
+          <p:cNvPr id="23" name="Image 2" descr="preencoded.png">    </p:cNvPr>
+          <p:cNvPicPr>
+            <a:picLocks noChangeAspect="1"/>
+          </p:cNvPicPr>
+          <p:nvPr/>
+        </p:nvPicPr>
+        <p:blipFill>
+          <a:blip r:embed="rId3"/>
+          <a:stretch>
+            <a:fillRect/>
+          </a:stretch>
+        </p:blipFill>
+        <p:spPr>
+          <a:xfrm>
+            <a:off x="6803085" y="128016"/>
+            <a:ext cx="201168" cy="201168"/>
+          </a:xfrm>
+          <a:prstGeom prst="rect">
+            <a:avLst/>
+          </a:prstGeom>
+        </p:spPr>
+      </p:pic>
+      <p:sp>
+        <p:nvSpPr>
+          <p:cNvPr id="24" name="Text 19"/>
+          <p:cNvSpPr txBox="1"/>
+          <p:nvPr/>
+        </p:nvSpPr>
+        <p:spPr>
+          <a:xfrm>
+            <a:off x="7059117" y="91440"/>
+            <a:ext cx="1705356" cy="274320"/>
+          </a:xfrm>
+          <a:prstGeom prst="rect">
+            <a:avLst/>
+          </a:prstGeom>
+          <a:noFill/>
+          <a:ln/>
+        </p:spPr>
+        <p:txBody>
+          <a:bodyPr wrap="square" lIns="0" tIns="0" rIns="0" bIns="0" rtlCol="0" anchor="ctr"/>
+          <a:lstStyle/>
+          <a:p>
+            <a:pPr indent="0" marL="0">
+              <a:buNone/>
+            </a:pPr>
+            <a:r>
+              <a:rPr lang="en-US" sz="1100" b="1" dirty="0">
+                <a:solidFill>
+                  <a:srgbClr val="92400E"/>
+                </a:solidFill>
+                <a:latin typeface="Calibri" pitchFamily="34" charset="0"/>
+                <a:ea typeface="Calibri" pitchFamily="34" charset="-122"/>
+                <a:cs typeface="Calibri" pitchFamily="34" charset="-120"/>
+              </a:rPr>
+              <a:t>DA UTILIZZARE OGGI</a:t>
+            </a:r>
+            <a:endParaRPr lang="en-US" sz="1100" dirty="0"/>
+          </a:p>
+        </p:txBody>
+      </p:sp>
+      <p:sp>
+        <p:nvSpPr>
+          <p:cNvPr id="25" name="Shape 20"/>
+          <p:cNvSpPr/>
+          <p:nvPr/>
+        </p:nvSpPr>
+        <p:spPr>
+          <a:xfrm>
+            <a:off x="4352747" y="91440"/>
+            <a:ext cx="2212594" cy="274320"/>
+          </a:xfrm>
+          <a:prstGeom prst="rect">
+            <a:avLst/>
+          </a:prstGeom>
+          <a:solidFill>
+            <a:srgbClr val="E0F2FE"/>
+          </a:solidFill>
+          <a:ln w="12700">
+            <a:solidFill>
+              <a:srgbClr val="0369A1"/>
+            </a:solidFill>
+            <a:prstDash val="solid"/>
+          </a:ln>
+        </p:spPr>
+      </p:sp>
+      <p:sp>
+        <p:nvSpPr>
+          <p:cNvPr id="26" name="Shape 21"/>
+          <p:cNvSpPr/>
+          <p:nvPr/>
+        </p:nvSpPr>
+        <p:spPr>
+          <a:xfrm>
+            <a:off x="4352747" y="91440"/>
+            <a:ext cx="73152" cy="274320"/>
+          </a:xfrm>
+          <a:prstGeom prst="rect">
+            <a:avLst/>
+          </a:prstGeom>
+          <a:solidFill>
+            <a:srgbClr val="0369A1"/>
+          </a:solidFill>
+          <a:ln w="12700">
+            <a:solidFill>
+              <a:srgbClr val="0369A1"/>
+            </a:solidFill>
+            <a:prstDash val="solid"/>
+          </a:ln>
+        </p:spPr>
+      </p:sp>
+      <p:pic>
+        <p:nvPicPr>
+          <p:cNvPr id="27" name="Image 3" descr="preencoded.png">    </p:cNvPr>
+          <p:cNvPicPr>
+            <a:picLocks noChangeAspect="1"/>
+          </p:cNvPicPr>
+          <p:nvPr/>
+        </p:nvPicPr>
+        <p:blipFill>
+          <a:blip r:embed="rId4"/>
+          <a:stretch>
+            <a:fillRect/>
+          </a:stretch>
+        </p:blipFill>
+        <p:spPr>
+          <a:xfrm>
+            <a:off x="4480763" y="128016"/>
+            <a:ext cx="201168" cy="201168"/>
+          </a:xfrm>
+          <a:prstGeom prst="rect">
+            <a:avLst/>
+          </a:prstGeom>
+        </p:spPr>
+      </p:pic>
+      <p:sp>
+        <p:nvSpPr>
+          <p:cNvPr id="28" name="Text 22"/>
+          <p:cNvSpPr txBox="1"/>
+          <p:nvPr/>
+        </p:nvSpPr>
+        <p:spPr>
+          <a:xfrm>
+            <a:off x="4736795" y="91440"/>
+            <a:ext cx="1791970" cy="274320"/>
+          </a:xfrm>
+          <a:prstGeom prst="rect">
+            <a:avLst/>
+          </a:prstGeom>
+          <a:noFill/>
+          <a:ln/>
+        </p:spPr>
+        <p:txBody>
+          <a:bodyPr wrap="square" lIns="0" tIns="0" rIns="0" bIns="0" rtlCol="0" anchor="ctr"/>
+          <a:lstStyle/>
+          <a:p>
+            <a:pPr indent="0" marL="0">
+              <a:buNone/>
+            </a:pPr>
+            <a:r>
+              <a:rPr lang="en-US" sz="1100" b="1" dirty="0">
+                <a:solidFill>
+                  <a:srgbClr val="075985"/>
+                </a:solidFill>
+                <a:latin typeface="Calibri" pitchFamily="34" charset="0"/>
+                <a:ea typeface="Calibri" pitchFamily="34" charset="-122"/>
+                <a:cs typeface="Calibri" pitchFamily="34" charset="-120"/>
+              </a:rPr>
+              <a:t>DA COMPRENDERE OGGI</a:t>
+            </a:r>
+            <a:endParaRPr lang="en-US" sz="1100" dirty="0"/>
+          </a:p>
+        </p:txBody>
+      </p:sp>
+      <p:sp>
+        <p:nvSpPr>
           <p:cNvPr id="25" name="Slide Number Placeholder 0"/>
           <p:cNvSpPr>
             <a:spLocks noGrp="1"/>
@@ -3443,6 +3867,158 @@
                 <a:cs typeface="Calibri" pitchFamily="34" charset="-120"/>
               </a:rPr>
               <a:t>Schermo nero: confrontate il cablaggio del display con il firmware</a:t>
+            </a:r>
+            <a:endParaRPr lang="en-US" sz="1100" dirty="0"/>
+          </a:p>
+        </p:txBody>
+      </p:sp>
+      <p:sp>
+        <p:nvSpPr>
+          <p:cNvPr id="17" name="Shape 15"/>
+          <p:cNvSpPr/>
+          <p:nvPr/>
+        </p:nvSpPr>
+        <p:spPr>
+          <a:xfrm>
+            <a:off x="7875600" y="91440"/>
+            <a:ext cx="3767455" cy="274320"/>
+          </a:xfrm>
+          <a:prstGeom prst="rect">
+            <a:avLst/>
+          </a:prstGeom>
+          <a:solidFill>
+            <a:srgbClr val="FEF3C7"/>
+          </a:solidFill>
+          <a:ln w="12700">
+            <a:solidFill>
+              <a:srgbClr val="B45309"/>
+            </a:solidFill>
+            <a:prstDash val="solid"/>
+          </a:ln>
+        </p:spPr>
+      </p:sp>
+      <p:sp>
+        <p:nvSpPr>
+          <p:cNvPr id="18" name="Shape 16"/>
+          <p:cNvSpPr/>
+          <p:nvPr/>
+        </p:nvSpPr>
+        <p:spPr>
+          <a:xfrm>
+            <a:off x="7875600" y="91440"/>
+            <a:ext cx="27432" cy="274320"/>
+          </a:xfrm>
+          <a:prstGeom prst="rect">
+            <a:avLst/>
+          </a:prstGeom>
+          <a:solidFill>
+            <a:srgbClr val="B45309"/>
+          </a:solidFill>
+          <a:ln w="12700">
+            <a:solidFill>
+              <a:srgbClr val="B45309"/>
+            </a:solidFill>
+            <a:prstDash val="solid"/>
+          </a:ln>
+        </p:spPr>
+      </p:sp>
+      <p:sp>
+        <p:nvSpPr>
+          <p:cNvPr id="19" name="Shape 17"/>
+          <p:cNvSpPr/>
+          <p:nvPr/>
+        </p:nvSpPr>
+        <p:spPr>
+          <a:xfrm>
+            <a:off x="7930464" y="91440"/>
+            <a:ext cx="27432" cy="274320"/>
+          </a:xfrm>
+          <a:prstGeom prst="rect">
+            <a:avLst/>
+          </a:prstGeom>
+          <a:solidFill>
+            <a:srgbClr val="B45309"/>
+          </a:solidFill>
+          <a:ln w="12700">
+            <a:solidFill>
+              <a:srgbClr val="B45309"/>
+            </a:solidFill>
+            <a:prstDash val="solid"/>
+          </a:ln>
+        </p:spPr>
+      </p:sp>
+      <p:pic>
+        <p:nvPicPr>
+          <p:cNvPr id="20" name="Image 0" descr="preencoded.png">    </p:cNvPr>
+          <p:cNvPicPr>
+            <a:picLocks noChangeAspect="1"/>
+          </p:cNvPicPr>
+          <p:nvPr/>
+        </p:nvPicPr>
+        <p:blipFill>
+          <a:blip r:embed="rId1"/>
+          <a:stretch>
+            <a:fillRect/>
+          </a:stretch>
+        </p:blipFill>
+        <p:spPr>
+          <a:xfrm>
+            <a:off x="8003616" y="128016"/>
+            <a:ext cx="201168" cy="201168"/>
+          </a:xfrm>
+          <a:prstGeom prst="rect">
+            <a:avLst/>
+          </a:prstGeom>
+        </p:spPr>
+      </p:pic>
+      <p:sp>
+        <p:nvSpPr>
+          <p:cNvPr id="21" name="Text 18"/>
+          <p:cNvSpPr txBox="1"/>
+          <p:nvPr/>
+        </p:nvSpPr>
+        <p:spPr>
+          <a:xfrm>
+            <a:off x="8259648" y="91440"/>
+            <a:ext cx="3346831" cy="274320"/>
+          </a:xfrm>
+          <a:prstGeom prst="rect">
+            <a:avLst/>
+          </a:prstGeom>
+          <a:noFill/>
+          <a:ln/>
+        </p:spPr>
+        <p:txBody>
+          <a:bodyPr wrap="square" lIns="0" tIns="0" rIns="0" bIns="0" rtlCol="0" anchor="ctr"/>
+          <a:lstStyle/>
+          <a:p>
+            <a:pPr indent="0" marL="0">
+              <a:buNone/>
+            </a:pPr>
+            <a:r>
+              <a:rPr lang="en-US" sz="1100" b="1" dirty="0">
+                <a:solidFill>
+                  <a:srgbClr val="92400E"/>
+                </a:solidFill>
+                <a:latin typeface="Calibri" pitchFamily="34" charset="0"/>
+                <a:ea typeface="Calibri" pitchFamily="34" charset="-122"/>
+                <a:cs typeface="Calibri" pitchFamily="34" charset="-120"/>
+              </a:rPr>
+              <a:t>DA UTILIZZARE OGGI</a:t>
+            </a:r>
+            <a:pPr indent="0" marL="0">
+              <a:buNone/>
+            </a:pPr>
+            <a:r>
+              <a:rPr lang="en-US" sz="1100" dirty="0">
+                <a:solidFill>
+                  <a:srgbClr val="92400E"/>
+                </a:solidFill>
+                <a:latin typeface="Calibri" pitchFamily="34" charset="0"/>
+                <a:ea typeface="Calibri" pitchFamily="34" charset="-122"/>
+                <a:cs typeface="Calibri" pitchFamily="34" charset="-120"/>
+              </a:rPr>
+              <a:t> · gli strumenti di PRG32</a:t>
             </a:r>
             <a:endParaRPr lang="en-US" sz="1100" dirty="0"/>
           </a:p>
@@ -4831,6 +5407,158 @@
       </p:graphicFrame>
       <p:sp>
         <p:nvSpPr>
+          <p:cNvPr id="4" name="Shape 1"/>
+          <p:cNvSpPr/>
+          <p:nvPr/>
+        </p:nvSpPr>
+        <p:spPr>
+          <a:xfrm>
+            <a:off x="7875600" y="91440"/>
+            <a:ext cx="3767455" cy="274320"/>
+          </a:xfrm>
+          <a:prstGeom prst="rect">
+            <a:avLst/>
+          </a:prstGeom>
+          <a:solidFill>
+            <a:srgbClr val="FEF3C7"/>
+          </a:solidFill>
+          <a:ln w="12700">
+            <a:solidFill>
+              <a:srgbClr val="B45309"/>
+            </a:solidFill>
+            <a:prstDash val="solid"/>
+          </a:ln>
+        </p:spPr>
+      </p:sp>
+      <p:sp>
+        <p:nvSpPr>
+          <p:cNvPr id="5" name="Shape 2"/>
+          <p:cNvSpPr/>
+          <p:nvPr/>
+        </p:nvSpPr>
+        <p:spPr>
+          <a:xfrm>
+            <a:off x="7875600" y="91440"/>
+            <a:ext cx="27432" cy="274320"/>
+          </a:xfrm>
+          <a:prstGeom prst="rect">
+            <a:avLst/>
+          </a:prstGeom>
+          <a:solidFill>
+            <a:srgbClr val="B45309"/>
+          </a:solidFill>
+          <a:ln w="12700">
+            <a:solidFill>
+              <a:srgbClr val="B45309"/>
+            </a:solidFill>
+            <a:prstDash val="solid"/>
+          </a:ln>
+        </p:spPr>
+      </p:sp>
+      <p:sp>
+        <p:nvSpPr>
+          <p:cNvPr id="6" name="Shape 3"/>
+          <p:cNvSpPr/>
+          <p:nvPr/>
+        </p:nvSpPr>
+        <p:spPr>
+          <a:xfrm>
+            <a:off x="7930464" y="91440"/>
+            <a:ext cx="27432" cy="274320"/>
+          </a:xfrm>
+          <a:prstGeom prst="rect">
+            <a:avLst/>
+          </a:prstGeom>
+          <a:solidFill>
+            <a:srgbClr val="B45309"/>
+          </a:solidFill>
+          <a:ln w="12700">
+            <a:solidFill>
+              <a:srgbClr val="B45309"/>
+            </a:solidFill>
+            <a:prstDash val="solid"/>
+          </a:ln>
+        </p:spPr>
+      </p:sp>
+      <p:pic>
+        <p:nvPicPr>
+          <p:cNvPr id="7" name="Image 0" descr="preencoded.png">    </p:cNvPr>
+          <p:cNvPicPr>
+            <a:picLocks noChangeAspect="1"/>
+          </p:cNvPicPr>
+          <p:nvPr/>
+        </p:nvPicPr>
+        <p:blipFill>
+          <a:blip r:embed="rId1"/>
+          <a:stretch>
+            <a:fillRect/>
+          </a:stretch>
+        </p:blipFill>
+        <p:spPr>
+          <a:xfrm>
+            <a:off x="8003616" y="128016"/>
+            <a:ext cx="201168" cy="201168"/>
+          </a:xfrm>
+          <a:prstGeom prst="rect">
+            <a:avLst/>
+          </a:prstGeom>
+        </p:spPr>
+      </p:pic>
+      <p:sp>
+        <p:nvSpPr>
+          <p:cNvPr id="8" name="Text 4"/>
+          <p:cNvSpPr txBox="1"/>
+          <p:nvPr/>
+        </p:nvSpPr>
+        <p:spPr>
+          <a:xfrm>
+            <a:off x="8259648" y="91440"/>
+            <a:ext cx="3346831" cy="274320"/>
+          </a:xfrm>
+          <a:prstGeom prst="rect">
+            <a:avLst/>
+          </a:prstGeom>
+          <a:noFill/>
+          <a:ln/>
+        </p:spPr>
+        <p:txBody>
+          <a:bodyPr wrap="square" lIns="0" tIns="0" rIns="0" bIns="0" rtlCol="0" anchor="ctr"/>
+          <a:lstStyle/>
+          <a:p>
+            <a:pPr indent="0" marL="0">
+              <a:buNone/>
+            </a:pPr>
+            <a:r>
+              <a:rPr lang="en-US" sz="1100" b="1" dirty="0">
+                <a:solidFill>
+                  <a:srgbClr val="92400E"/>
+                </a:solidFill>
+                <a:latin typeface="Calibri" pitchFamily="34" charset="0"/>
+                <a:ea typeface="Calibri" pitchFamily="34" charset="-122"/>
+                <a:cs typeface="Calibri" pitchFamily="34" charset="-120"/>
+              </a:rPr>
+              <a:t>DA UTILIZZARE OGGI</a:t>
+            </a:r>
+            <a:pPr indent="0" marL="0">
+              <a:buNone/>
+            </a:pPr>
+            <a:r>
+              <a:rPr lang="en-US" sz="1100" dirty="0">
+                <a:solidFill>
+                  <a:srgbClr val="92400E"/>
+                </a:solidFill>
+                <a:latin typeface="Calibri" pitchFamily="34" charset="0"/>
+                <a:ea typeface="Calibri" pitchFamily="34" charset="-122"/>
+                <a:cs typeface="Calibri" pitchFamily="34" charset="-120"/>
+              </a:rPr>
+              <a:t> · gli strumenti di PRG32</a:t>
+            </a:r>
+            <a:endParaRPr lang="en-US" sz="1100" dirty="0"/>
+          </a:p>
+        </p:txBody>
+      </p:sp>
+      <p:sp>
+        <p:nvSpPr>
           <p:cNvPr id="25" name="Slide Number Placeholder 0"/>
           <p:cNvSpPr>
             <a:spLocks noGrp="1"/>
@@ -7213,6 +7941,133 @@
       </p:sp>
       <p:sp>
         <p:nvSpPr>
+          <p:cNvPr id="17" name="Shape 15"/>
+          <p:cNvSpPr/>
+          <p:nvPr/>
+        </p:nvSpPr>
+        <p:spPr>
+          <a:xfrm>
+            <a:off x="7526350" y="91440"/>
+            <a:ext cx="4116705" cy="274320"/>
+          </a:xfrm>
+          <a:prstGeom prst="rect">
+            <a:avLst/>
+          </a:prstGeom>
+          <a:solidFill>
+            <a:srgbClr val="E0F2FE"/>
+          </a:solidFill>
+          <a:ln w="12700">
+            <a:solidFill>
+              <a:srgbClr val="0369A1"/>
+            </a:solidFill>
+            <a:prstDash val="solid"/>
+          </a:ln>
+        </p:spPr>
+      </p:sp>
+      <p:sp>
+        <p:nvSpPr>
+          <p:cNvPr id="18" name="Shape 16"/>
+          <p:cNvSpPr/>
+          <p:nvPr/>
+        </p:nvSpPr>
+        <p:spPr>
+          <a:xfrm>
+            <a:off x="7526350" y="91440"/>
+            <a:ext cx="73152" cy="274320"/>
+          </a:xfrm>
+          <a:prstGeom prst="rect">
+            <a:avLst/>
+          </a:prstGeom>
+          <a:solidFill>
+            <a:srgbClr val="0369A1"/>
+          </a:solidFill>
+          <a:ln w="12700">
+            <a:solidFill>
+              <a:srgbClr val="0369A1"/>
+            </a:solidFill>
+            <a:prstDash val="solid"/>
+          </a:ln>
+        </p:spPr>
+      </p:sp>
+      <p:pic>
+        <p:nvPicPr>
+          <p:cNvPr id="19" name="Image 0" descr="preencoded.png">    </p:cNvPr>
+          <p:cNvPicPr>
+            <a:picLocks noChangeAspect="1"/>
+          </p:cNvPicPr>
+          <p:nvPr/>
+        </p:nvPicPr>
+        <p:blipFill>
+          <a:blip r:embed="rId1"/>
+          <a:stretch>
+            <a:fillRect/>
+          </a:stretch>
+        </p:blipFill>
+        <p:spPr>
+          <a:xfrm>
+            <a:off x="7654366" y="128016"/>
+            <a:ext cx="201168" cy="201168"/>
+          </a:xfrm>
+          <a:prstGeom prst="rect">
+            <a:avLst/>
+          </a:prstGeom>
+        </p:spPr>
+      </p:pic>
+      <p:sp>
+        <p:nvSpPr>
+          <p:cNvPr id="20" name="Text 17"/>
+          <p:cNvSpPr txBox="1"/>
+          <p:nvPr/>
+        </p:nvSpPr>
+        <p:spPr>
+          <a:xfrm>
+            <a:off x="7910398" y="91440"/>
+            <a:ext cx="3696081" cy="274320"/>
+          </a:xfrm>
+          <a:prstGeom prst="rect">
+            <a:avLst/>
+          </a:prstGeom>
+          <a:noFill/>
+          <a:ln/>
+        </p:spPr>
+        <p:txBody>
+          <a:bodyPr wrap="square" lIns="0" tIns="0" rIns="0" bIns="0" rtlCol="0" anchor="ctr"/>
+          <a:lstStyle/>
+          <a:p>
+            <a:pPr indent="0" marL="0">
+              <a:buNone/>
+            </a:pPr>
+            <a:r>
+              <a:rPr lang="en-US" sz="1100" b="1" dirty="0">
+                <a:solidFill>
+                  <a:srgbClr val="075985"/>
+                </a:solidFill>
+                <a:latin typeface="Calibri" pitchFamily="34" charset="0"/>
+                <a:ea typeface="Calibri" pitchFamily="34" charset="-122"/>
+                <a:cs typeface="Calibri" pitchFamily="34" charset="-120"/>
+              </a:rPr>
+              <a:t>DA COMPRENDERE OGGI</a:t>
+            </a:r>
+            <a:pPr indent="0" marL="0">
+              <a:buNone/>
+            </a:pPr>
+            <a:r>
+              <a:rPr lang="en-US" sz="1100" dirty="0">
+                <a:solidFill>
+                  <a:srgbClr val="075985"/>
+                </a:solidFill>
+                <a:latin typeface="Calibri" pitchFamily="34" charset="0"/>
+                <a:ea typeface="Calibri" pitchFamily="34" charset="-122"/>
+                <a:cs typeface="Calibri" pitchFamily="34" charset="-120"/>
+              </a:rPr>
+              <a:t> · polling, interruzioni, DMA</a:t>
+            </a:r>
+            <a:endParaRPr lang="en-US" sz="1100" dirty="0"/>
+          </a:p>
+        </p:txBody>
+      </p:sp>
+      <p:sp>
+        <p:nvSpPr>
           <p:cNvPr id="25" name="Slide Number Placeholder 0"/>
           <p:cNvSpPr>
             <a:spLocks noGrp="1"/>
@@ -7750,6 +8605,158 @@
       </p:sp>
       <p:sp>
         <p:nvSpPr>
+          <p:cNvPr id="5" name="Shape 3"/>
+          <p:cNvSpPr/>
+          <p:nvPr/>
+        </p:nvSpPr>
+        <p:spPr>
+          <a:xfrm>
+            <a:off x="7941259" y="91440"/>
+            <a:ext cx="3701796" cy="274320"/>
+          </a:xfrm>
+          <a:prstGeom prst="rect">
+            <a:avLst/>
+          </a:prstGeom>
+          <a:solidFill>
+            <a:srgbClr val="FEF3C7"/>
+          </a:solidFill>
+          <a:ln w="12700">
+            <a:solidFill>
+              <a:srgbClr val="B45309"/>
+            </a:solidFill>
+            <a:prstDash val="solid"/>
+          </a:ln>
+        </p:spPr>
+      </p:sp>
+      <p:sp>
+        <p:nvSpPr>
+          <p:cNvPr id="6" name="Shape 4"/>
+          <p:cNvSpPr/>
+          <p:nvPr/>
+        </p:nvSpPr>
+        <p:spPr>
+          <a:xfrm>
+            <a:off x="7941259" y="91440"/>
+            <a:ext cx="27432" cy="274320"/>
+          </a:xfrm>
+          <a:prstGeom prst="rect">
+            <a:avLst/>
+          </a:prstGeom>
+          <a:solidFill>
+            <a:srgbClr val="B45309"/>
+          </a:solidFill>
+          <a:ln w="12700">
+            <a:solidFill>
+              <a:srgbClr val="B45309"/>
+            </a:solidFill>
+            <a:prstDash val="solid"/>
+          </a:ln>
+        </p:spPr>
+      </p:sp>
+      <p:sp>
+        <p:nvSpPr>
+          <p:cNvPr id="7" name="Shape 5"/>
+          <p:cNvSpPr/>
+          <p:nvPr/>
+        </p:nvSpPr>
+        <p:spPr>
+          <a:xfrm>
+            <a:off x="7996123" y="91440"/>
+            <a:ext cx="27432" cy="274320"/>
+          </a:xfrm>
+          <a:prstGeom prst="rect">
+            <a:avLst/>
+          </a:prstGeom>
+          <a:solidFill>
+            <a:srgbClr val="B45309"/>
+          </a:solidFill>
+          <a:ln w="12700">
+            <a:solidFill>
+              <a:srgbClr val="B45309"/>
+            </a:solidFill>
+            <a:prstDash val="solid"/>
+          </a:ln>
+        </p:spPr>
+      </p:sp>
+      <p:pic>
+        <p:nvPicPr>
+          <p:cNvPr id="8" name="Image 0" descr="preencoded.png">    </p:cNvPr>
+          <p:cNvPicPr>
+            <a:picLocks noChangeAspect="1"/>
+          </p:cNvPicPr>
+          <p:nvPr/>
+        </p:nvPicPr>
+        <p:blipFill>
+          <a:blip r:embed="rId1"/>
+          <a:stretch>
+            <a:fillRect/>
+          </a:stretch>
+        </p:blipFill>
+        <p:spPr>
+          <a:xfrm>
+            <a:off x="8069275" y="128016"/>
+            <a:ext cx="201168" cy="201168"/>
+          </a:xfrm>
+          <a:prstGeom prst="rect">
+            <a:avLst/>
+          </a:prstGeom>
+        </p:spPr>
+      </p:pic>
+      <p:sp>
+        <p:nvSpPr>
+          <p:cNvPr id="9" name="Text 6"/>
+          <p:cNvSpPr txBox="1"/>
+          <p:nvPr/>
+        </p:nvSpPr>
+        <p:spPr>
+          <a:xfrm>
+            <a:off x="8325307" y="91440"/>
+            <a:ext cx="3281172" cy="274320"/>
+          </a:xfrm>
+          <a:prstGeom prst="rect">
+            <a:avLst/>
+          </a:prstGeom>
+          <a:noFill/>
+          <a:ln/>
+        </p:spPr>
+        <p:txBody>
+          <a:bodyPr wrap="square" lIns="0" tIns="0" rIns="0" bIns="0" rtlCol="0" anchor="ctr"/>
+          <a:lstStyle/>
+          <a:p>
+            <a:pPr indent="0" marL="0">
+              <a:buNone/>
+            </a:pPr>
+            <a:r>
+              <a:rPr lang="en-US" sz="1100" b="1" dirty="0">
+                <a:solidFill>
+                  <a:srgbClr val="92400E"/>
+                </a:solidFill>
+                <a:latin typeface="Calibri" pitchFamily="34" charset="0"/>
+                <a:ea typeface="Calibri" pitchFamily="34" charset="-122"/>
+                <a:cs typeface="Calibri" pitchFamily="34" charset="-120"/>
+              </a:rPr>
+              <a:t>DA UTILIZZARE OGGI</a:t>
+            </a:r>
+            <a:pPr indent="0" marL="0">
+              <a:buNone/>
+            </a:pPr>
+            <a:r>
+              <a:rPr lang="en-US" sz="1100" dirty="0">
+                <a:solidFill>
+                  <a:srgbClr val="92400E"/>
+                </a:solidFill>
+                <a:latin typeface="Calibri" pitchFamily="34" charset="0"/>
+                <a:ea typeface="Calibri" pitchFamily="34" charset="-122"/>
+                <a:cs typeface="Calibri" pitchFamily="34" charset="-120"/>
+              </a:rPr>
+              <a:t> · il programma completo</a:t>
+            </a:r>
+            <a:endParaRPr lang="en-US" sz="1100" dirty="0"/>
+          </a:p>
+        </p:txBody>
+      </p:sp>
+      <p:sp>
+        <p:nvSpPr>
           <p:cNvPr id="25" name="Slide Number Placeholder 0"/>
           <p:cNvSpPr>
             <a:spLocks noGrp="1"/>
@@ -8396,6 +9403,158 @@
       </p:sp>
       <p:sp>
         <p:nvSpPr>
+          <p:cNvPr id="5" name="Shape 3"/>
+          <p:cNvSpPr/>
+          <p:nvPr/>
+        </p:nvSpPr>
+        <p:spPr>
+          <a:xfrm>
+            <a:off x="7941259" y="91440"/>
+            <a:ext cx="3701796" cy="274320"/>
+          </a:xfrm>
+          <a:prstGeom prst="rect">
+            <a:avLst/>
+          </a:prstGeom>
+          <a:solidFill>
+            <a:srgbClr val="FEF3C7"/>
+          </a:solidFill>
+          <a:ln w="12700">
+            <a:solidFill>
+              <a:srgbClr val="B45309"/>
+            </a:solidFill>
+            <a:prstDash val="solid"/>
+          </a:ln>
+        </p:spPr>
+      </p:sp>
+      <p:sp>
+        <p:nvSpPr>
+          <p:cNvPr id="6" name="Shape 4"/>
+          <p:cNvSpPr/>
+          <p:nvPr/>
+        </p:nvSpPr>
+        <p:spPr>
+          <a:xfrm>
+            <a:off x="7941259" y="91440"/>
+            <a:ext cx="27432" cy="274320"/>
+          </a:xfrm>
+          <a:prstGeom prst="rect">
+            <a:avLst/>
+          </a:prstGeom>
+          <a:solidFill>
+            <a:srgbClr val="B45309"/>
+          </a:solidFill>
+          <a:ln w="12700">
+            <a:solidFill>
+              <a:srgbClr val="B45309"/>
+            </a:solidFill>
+            <a:prstDash val="solid"/>
+          </a:ln>
+        </p:spPr>
+      </p:sp>
+      <p:sp>
+        <p:nvSpPr>
+          <p:cNvPr id="7" name="Shape 5"/>
+          <p:cNvSpPr/>
+          <p:nvPr/>
+        </p:nvSpPr>
+        <p:spPr>
+          <a:xfrm>
+            <a:off x="7996123" y="91440"/>
+            <a:ext cx="27432" cy="274320"/>
+          </a:xfrm>
+          <a:prstGeom prst="rect">
+            <a:avLst/>
+          </a:prstGeom>
+          <a:solidFill>
+            <a:srgbClr val="B45309"/>
+          </a:solidFill>
+          <a:ln w="12700">
+            <a:solidFill>
+              <a:srgbClr val="B45309"/>
+            </a:solidFill>
+            <a:prstDash val="solid"/>
+          </a:ln>
+        </p:spPr>
+      </p:sp>
+      <p:pic>
+        <p:nvPicPr>
+          <p:cNvPr id="8" name="Image 0" descr="preencoded.png">    </p:cNvPr>
+          <p:cNvPicPr>
+            <a:picLocks noChangeAspect="1"/>
+          </p:cNvPicPr>
+          <p:nvPr/>
+        </p:nvPicPr>
+        <p:blipFill>
+          <a:blip r:embed="rId1"/>
+          <a:stretch>
+            <a:fillRect/>
+          </a:stretch>
+        </p:blipFill>
+        <p:spPr>
+          <a:xfrm>
+            <a:off x="8069275" y="128016"/>
+            <a:ext cx="201168" cy="201168"/>
+          </a:xfrm>
+          <a:prstGeom prst="rect">
+            <a:avLst/>
+          </a:prstGeom>
+        </p:spPr>
+      </p:pic>
+      <p:sp>
+        <p:nvSpPr>
+          <p:cNvPr id="9" name="Text 6"/>
+          <p:cNvSpPr txBox="1"/>
+          <p:nvPr/>
+        </p:nvSpPr>
+        <p:spPr>
+          <a:xfrm>
+            <a:off x="8325307" y="91440"/>
+            <a:ext cx="3281172" cy="274320"/>
+          </a:xfrm>
+          <a:prstGeom prst="rect">
+            <a:avLst/>
+          </a:prstGeom>
+          <a:noFill/>
+          <a:ln/>
+        </p:spPr>
+        <p:txBody>
+          <a:bodyPr wrap="square" lIns="0" tIns="0" rIns="0" bIns="0" rtlCol="0" anchor="ctr"/>
+          <a:lstStyle/>
+          <a:p>
+            <a:pPr indent="0" marL="0">
+              <a:buNone/>
+            </a:pPr>
+            <a:r>
+              <a:rPr lang="en-US" sz="1100" b="1" dirty="0">
+                <a:solidFill>
+                  <a:srgbClr val="92400E"/>
+                </a:solidFill>
+                <a:latin typeface="Calibri" pitchFamily="34" charset="0"/>
+                <a:ea typeface="Calibri" pitchFamily="34" charset="-122"/>
+                <a:cs typeface="Calibri" pitchFamily="34" charset="-120"/>
+              </a:rPr>
+              <a:t>DA UTILIZZARE OGGI</a:t>
+            </a:r>
+            <a:pPr indent="0" marL="0">
+              <a:buNone/>
+            </a:pPr>
+            <a:r>
+              <a:rPr lang="en-US" sz="1100" dirty="0">
+                <a:solidFill>
+                  <a:srgbClr val="92400E"/>
+                </a:solidFill>
+                <a:latin typeface="Calibri" pitchFamily="34" charset="0"/>
+                <a:ea typeface="Calibri" pitchFamily="34" charset="-122"/>
+                <a:cs typeface="Calibri" pitchFamily="34" charset="-120"/>
+              </a:rPr>
+              <a:t> · il programma completo</a:t>
+            </a:r>
+            <a:endParaRPr lang="en-US" sz="1100" dirty="0"/>
+          </a:p>
+        </p:txBody>
+      </p:sp>
+      <p:sp>
+        <p:nvSpPr>
           <p:cNvPr id="25" name="Slide Number Placeholder 0"/>
           <p:cNvSpPr>
             <a:spLocks noGrp="1"/>
@@ -8865,6 +10024,158 @@
       </p:sp>
       <p:sp>
         <p:nvSpPr>
+          <p:cNvPr id="5" name="Shape 3"/>
+          <p:cNvSpPr/>
+          <p:nvPr/>
+        </p:nvSpPr>
+        <p:spPr>
+          <a:xfrm>
+            <a:off x="7941259" y="91440"/>
+            <a:ext cx="3701796" cy="274320"/>
+          </a:xfrm>
+          <a:prstGeom prst="rect">
+            <a:avLst/>
+          </a:prstGeom>
+          <a:solidFill>
+            <a:srgbClr val="FEF3C7"/>
+          </a:solidFill>
+          <a:ln w="12700">
+            <a:solidFill>
+              <a:srgbClr val="B45309"/>
+            </a:solidFill>
+            <a:prstDash val="solid"/>
+          </a:ln>
+        </p:spPr>
+      </p:sp>
+      <p:sp>
+        <p:nvSpPr>
+          <p:cNvPr id="6" name="Shape 4"/>
+          <p:cNvSpPr/>
+          <p:nvPr/>
+        </p:nvSpPr>
+        <p:spPr>
+          <a:xfrm>
+            <a:off x="7941259" y="91440"/>
+            <a:ext cx="27432" cy="274320"/>
+          </a:xfrm>
+          <a:prstGeom prst="rect">
+            <a:avLst/>
+          </a:prstGeom>
+          <a:solidFill>
+            <a:srgbClr val="B45309"/>
+          </a:solidFill>
+          <a:ln w="12700">
+            <a:solidFill>
+              <a:srgbClr val="B45309"/>
+            </a:solidFill>
+            <a:prstDash val="solid"/>
+          </a:ln>
+        </p:spPr>
+      </p:sp>
+      <p:sp>
+        <p:nvSpPr>
+          <p:cNvPr id="7" name="Shape 5"/>
+          <p:cNvSpPr/>
+          <p:nvPr/>
+        </p:nvSpPr>
+        <p:spPr>
+          <a:xfrm>
+            <a:off x="7996123" y="91440"/>
+            <a:ext cx="27432" cy="274320"/>
+          </a:xfrm>
+          <a:prstGeom prst="rect">
+            <a:avLst/>
+          </a:prstGeom>
+          <a:solidFill>
+            <a:srgbClr val="B45309"/>
+          </a:solidFill>
+          <a:ln w="12700">
+            <a:solidFill>
+              <a:srgbClr val="B45309"/>
+            </a:solidFill>
+            <a:prstDash val="solid"/>
+          </a:ln>
+        </p:spPr>
+      </p:sp>
+      <p:pic>
+        <p:nvPicPr>
+          <p:cNvPr id="8" name="Image 0" descr="preencoded.png">    </p:cNvPr>
+          <p:cNvPicPr>
+            <a:picLocks noChangeAspect="1"/>
+          </p:cNvPicPr>
+          <p:nvPr/>
+        </p:nvPicPr>
+        <p:blipFill>
+          <a:blip r:embed="rId1"/>
+          <a:stretch>
+            <a:fillRect/>
+          </a:stretch>
+        </p:blipFill>
+        <p:spPr>
+          <a:xfrm>
+            <a:off x="8069275" y="128016"/>
+            <a:ext cx="201168" cy="201168"/>
+          </a:xfrm>
+          <a:prstGeom prst="rect">
+            <a:avLst/>
+          </a:prstGeom>
+        </p:spPr>
+      </p:pic>
+      <p:sp>
+        <p:nvSpPr>
+          <p:cNvPr id="9" name="Text 6"/>
+          <p:cNvSpPr txBox="1"/>
+          <p:nvPr/>
+        </p:nvSpPr>
+        <p:spPr>
+          <a:xfrm>
+            <a:off x="8325307" y="91440"/>
+            <a:ext cx="3281172" cy="274320"/>
+          </a:xfrm>
+          <a:prstGeom prst="rect">
+            <a:avLst/>
+          </a:prstGeom>
+          <a:noFill/>
+          <a:ln/>
+        </p:spPr>
+        <p:txBody>
+          <a:bodyPr wrap="square" lIns="0" tIns="0" rIns="0" bIns="0" rtlCol="0" anchor="ctr"/>
+          <a:lstStyle/>
+          <a:p>
+            <a:pPr indent="0" marL="0">
+              <a:buNone/>
+            </a:pPr>
+            <a:r>
+              <a:rPr lang="en-US" sz="1100" b="1" dirty="0">
+                <a:solidFill>
+                  <a:srgbClr val="92400E"/>
+                </a:solidFill>
+                <a:latin typeface="Calibri" pitchFamily="34" charset="0"/>
+                <a:ea typeface="Calibri" pitchFamily="34" charset="-122"/>
+                <a:cs typeface="Calibri" pitchFamily="34" charset="-120"/>
+              </a:rPr>
+              <a:t>DA UTILIZZARE OGGI</a:t>
+            </a:r>
+            <a:pPr indent="0" marL="0">
+              <a:buNone/>
+            </a:pPr>
+            <a:r>
+              <a:rPr lang="en-US" sz="1100" dirty="0">
+                <a:solidFill>
+                  <a:srgbClr val="92400E"/>
+                </a:solidFill>
+                <a:latin typeface="Calibri" pitchFamily="34" charset="0"/>
+                <a:ea typeface="Calibri" pitchFamily="34" charset="-122"/>
+                <a:cs typeface="Calibri" pitchFamily="34" charset="-120"/>
+              </a:rPr>
+              <a:t> · il programma completo</a:t>
+            </a:r>
+            <a:endParaRPr lang="en-US" sz="1100" dirty="0"/>
+          </a:p>
+        </p:txBody>
+      </p:sp>
+      <p:sp>
+        <p:nvSpPr>
           <p:cNvPr id="25" name="Slide Number Placeholder 0"/>
           <p:cNvSpPr>
             <a:spLocks noGrp="1"/>
@@ -10018,6 +11329,158 @@
       </p:sp>
       <p:sp>
         <p:nvSpPr>
+          <p:cNvPr id="17" name="Shape 15"/>
+          <p:cNvSpPr/>
+          <p:nvPr/>
+        </p:nvSpPr>
+        <p:spPr>
+          <a:xfrm>
+            <a:off x="7875600" y="91440"/>
+            <a:ext cx="3767455" cy="274320"/>
+          </a:xfrm>
+          <a:prstGeom prst="rect">
+            <a:avLst/>
+          </a:prstGeom>
+          <a:solidFill>
+            <a:srgbClr val="FEF3C7"/>
+          </a:solidFill>
+          <a:ln w="12700">
+            <a:solidFill>
+              <a:srgbClr val="B45309"/>
+            </a:solidFill>
+            <a:prstDash val="solid"/>
+          </a:ln>
+        </p:spPr>
+      </p:sp>
+      <p:sp>
+        <p:nvSpPr>
+          <p:cNvPr id="18" name="Shape 16"/>
+          <p:cNvSpPr/>
+          <p:nvPr/>
+        </p:nvSpPr>
+        <p:spPr>
+          <a:xfrm>
+            <a:off x="7875600" y="91440"/>
+            <a:ext cx="27432" cy="274320"/>
+          </a:xfrm>
+          <a:prstGeom prst="rect">
+            <a:avLst/>
+          </a:prstGeom>
+          <a:solidFill>
+            <a:srgbClr val="B45309"/>
+          </a:solidFill>
+          <a:ln w="12700">
+            <a:solidFill>
+              <a:srgbClr val="B45309"/>
+            </a:solidFill>
+            <a:prstDash val="solid"/>
+          </a:ln>
+        </p:spPr>
+      </p:sp>
+      <p:sp>
+        <p:nvSpPr>
+          <p:cNvPr id="19" name="Shape 17"/>
+          <p:cNvSpPr/>
+          <p:nvPr/>
+        </p:nvSpPr>
+        <p:spPr>
+          <a:xfrm>
+            <a:off x="7930464" y="91440"/>
+            <a:ext cx="27432" cy="274320"/>
+          </a:xfrm>
+          <a:prstGeom prst="rect">
+            <a:avLst/>
+          </a:prstGeom>
+          <a:solidFill>
+            <a:srgbClr val="B45309"/>
+          </a:solidFill>
+          <a:ln w="12700">
+            <a:solidFill>
+              <a:srgbClr val="B45309"/>
+            </a:solidFill>
+            <a:prstDash val="solid"/>
+          </a:ln>
+        </p:spPr>
+      </p:sp>
+      <p:pic>
+        <p:nvPicPr>
+          <p:cNvPr id="20" name="Image 0" descr="preencoded.png">    </p:cNvPr>
+          <p:cNvPicPr>
+            <a:picLocks noChangeAspect="1"/>
+          </p:cNvPicPr>
+          <p:nvPr/>
+        </p:nvPicPr>
+        <p:blipFill>
+          <a:blip r:embed="rId1"/>
+          <a:stretch>
+            <a:fillRect/>
+          </a:stretch>
+        </p:blipFill>
+        <p:spPr>
+          <a:xfrm>
+            <a:off x="8003616" y="128016"/>
+            <a:ext cx="201168" cy="201168"/>
+          </a:xfrm>
+          <a:prstGeom prst="rect">
+            <a:avLst/>
+          </a:prstGeom>
+        </p:spPr>
+      </p:pic>
+      <p:sp>
+        <p:nvSpPr>
+          <p:cNvPr id="21" name="Text 18"/>
+          <p:cNvSpPr txBox="1"/>
+          <p:nvPr/>
+        </p:nvSpPr>
+        <p:spPr>
+          <a:xfrm>
+            <a:off x="8259648" y="91440"/>
+            <a:ext cx="3346831" cy="274320"/>
+          </a:xfrm>
+          <a:prstGeom prst="rect">
+            <a:avLst/>
+          </a:prstGeom>
+          <a:noFill/>
+          <a:ln/>
+        </p:spPr>
+        <p:txBody>
+          <a:bodyPr wrap="square" lIns="0" tIns="0" rIns="0" bIns="0" rtlCol="0" anchor="ctr"/>
+          <a:lstStyle/>
+          <a:p>
+            <a:pPr indent="0" marL="0">
+              <a:buNone/>
+            </a:pPr>
+            <a:r>
+              <a:rPr lang="en-US" sz="1100" b="1" dirty="0">
+                <a:solidFill>
+                  <a:srgbClr val="92400E"/>
+                </a:solidFill>
+                <a:latin typeface="Calibri" pitchFamily="34" charset="0"/>
+                <a:ea typeface="Calibri" pitchFamily="34" charset="-122"/>
+                <a:cs typeface="Calibri" pitchFamily="34" charset="-120"/>
+              </a:rPr>
+              <a:t>DA UTILIZZARE OGGI</a:t>
+            </a:r>
+            <a:pPr indent="0" marL="0">
+              <a:buNone/>
+            </a:pPr>
+            <a:r>
+              <a:rPr lang="en-US" sz="1100" dirty="0">
+                <a:solidFill>
+                  <a:srgbClr val="92400E"/>
+                </a:solidFill>
+                <a:latin typeface="Calibri" pitchFamily="34" charset="0"/>
+                <a:ea typeface="Calibri" pitchFamily="34" charset="-122"/>
+                <a:cs typeface="Calibri" pitchFamily="34" charset="-120"/>
+              </a:rPr>
+              <a:t> · gli strumenti di PRG32</a:t>
+            </a:r>
+            <a:endParaRPr lang="en-US" sz="1100" dirty="0"/>
+          </a:p>
+        </p:txBody>
+      </p:sp>
+      <p:sp>
+        <p:nvSpPr>
           <p:cNvPr id="25" name="Slide Number Placeholder 0"/>
           <p:cNvSpPr>
             <a:spLocks noGrp="1"/>
@@ -10847,6 +12310,158 @@
                 <a:cs typeface="Calibri" pitchFamily="34" charset="-120"/>
               </a:rPr>
               <a:t>I tasti vanno al terminale: frecce o WASD, Z o J per A, X o K per B</a:t>
+            </a:r>
+            <a:endParaRPr lang="en-US" sz="1100" dirty="0"/>
+          </a:p>
+        </p:txBody>
+      </p:sp>
+      <p:sp>
+        <p:nvSpPr>
+          <p:cNvPr id="17" name="Shape 15"/>
+          <p:cNvSpPr/>
+          <p:nvPr/>
+        </p:nvSpPr>
+        <p:spPr>
+          <a:xfrm>
+            <a:off x="7875600" y="91440"/>
+            <a:ext cx="3767455" cy="274320"/>
+          </a:xfrm>
+          <a:prstGeom prst="rect">
+            <a:avLst/>
+          </a:prstGeom>
+          <a:solidFill>
+            <a:srgbClr val="FEF3C7"/>
+          </a:solidFill>
+          <a:ln w="12700">
+            <a:solidFill>
+              <a:srgbClr val="B45309"/>
+            </a:solidFill>
+            <a:prstDash val="solid"/>
+          </a:ln>
+        </p:spPr>
+      </p:sp>
+      <p:sp>
+        <p:nvSpPr>
+          <p:cNvPr id="18" name="Shape 16"/>
+          <p:cNvSpPr/>
+          <p:nvPr/>
+        </p:nvSpPr>
+        <p:spPr>
+          <a:xfrm>
+            <a:off x="7875600" y="91440"/>
+            <a:ext cx="27432" cy="274320"/>
+          </a:xfrm>
+          <a:prstGeom prst="rect">
+            <a:avLst/>
+          </a:prstGeom>
+          <a:solidFill>
+            <a:srgbClr val="B45309"/>
+          </a:solidFill>
+          <a:ln w="12700">
+            <a:solidFill>
+              <a:srgbClr val="B45309"/>
+            </a:solidFill>
+            <a:prstDash val="solid"/>
+          </a:ln>
+        </p:spPr>
+      </p:sp>
+      <p:sp>
+        <p:nvSpPr>
+          <p:cNvPr id="19" name="Shape 17"/>
+          <p:cNvSpPr/>
+          <p:nvPr/>
+        </p:nvSpPr>
+        <p:spPr>
+          <a:xfrm>
+            <a:off x="7930464" y="91440"/>
+            <a:ext cx="27432" cy="274320"/>
+          </a:xfrm>
+          <a:prstGeom prst="rect">
+            <a:avLst/>
+          </a:prstGeom>
+          <a:solidFill>
+            <a:srgbClr val="B45309"/>
+          </a:solidFill>
+          <a:ln w="12700">
+            <a:solidFill>
+              <a:srgbClr val="B45309"/>
+            </a:solidFill>
+            <a:prstDash val="solid"/>
+          </a:ln>
+        </p:spPr>
+      </p:sp>
+      <p:pic>
+        <p:nvPicPr>
+          <p:cNvPr id="20" name="Image 0" descr="preencoded.png">    </p:cNvPr>
+          <p:cNvPicPr>
+            <a:picLocks noChangeAspect="1"/>
+          </p:cNvPicPr>
+          <p:nvPr/>
+        </p:nvPicPr>
+        <p:blipFill>
+          <a:blip r:embed="rId1"/>
+          <a:stretch>
+            <a:fillRect/>
+          </a:stretch>
+        </p:blipFill>
+        <p:spPr>
+          <a:xfrm>
+            <a:off x="8003616" y="128016"/>
+            <a:ext cx="201168" cy="201168"/>
+          </a:xfrm>
+          <a:prstGeom prst="rect">
+            <a:avLst/>
+          </a:prstGeom>
+        </p:spPr>
+      </p:pic>
+      <p:sp>
+        <p:nvSpPr>
+          <p:cNvPr id="21" name="Text 18"/>
+          <p:cNvSpPr txBox="1"/>
+          <p:nvPr/>
+        </p:nvSpPr>
+        <p:spPr>
+          <a:xfrm>
+            <a:off x="8259648" y="91440"/>
+            <a:ext cx="3346831" cy="274320"/>
+          </a:xfrm>
+          <a:prstGeom prst="rect">
+            <a:avLst/>
+          </a:prstGeom>
+          <a:noFill/>
+          <a:ln/>
+        </p:spPr>
+        <p:txBody>
+          <a:bodyPr wrap="square" lIns="0" tIns="0" rIns="0" bIns="0" rtlCol="0" anchor="ctr"/>
+          <a:lstStyle/>
+          <a:p>
+            <a:pPr indent="0" marL="0">
+              <a:buNone/>
+            </a:pPr>
+            <a:r>
+              <a:rPr lang="en-US" sz="1100" b="1" dirty="0">
+                <a:solidFill>
+                  <a:srgbClr val="92400E"/>
+                </a:solidFill>
+                <a:latin typeface="Calibri" pitchFamily="34" charset="0"/>
+                <a:ea typeface="Calibri" pitchFamily="34" charset="-122"/>
+                <a:cs typeface="Calibri" pitchFamily="34" charset="-120"/>
+              </a:rPr>
+              <a:t>DA UTILIZZARE OGGI</a:t>
+            </a:r>
+            <a:pPr indent="0" marL="0">
+              <a:buNone/>
+            </a:pPr>
+            <a:r>
+              <a:rPr lang="en-US" sz="1100" dirty="0">
+                <a:solidFill>
+                  <a:srgbClr val="92400E"/>
+                </a:solidFill>
+                <a:latin typeface="Calibri" pitchFamily="34" charset="0"/>
+                <a:ea typeface="Calibri" pitchFamily="34" charset="-122"/>
+                <a:cs typeface="Calibri" pitchFamily="34" charset="-120"/>
+              </a:rPr>
+              <a:t> · gli strumenti di PRG32</a:t>
             </a:r>
             <a:endParaRPr lang="en-US" sz="1100" dirty="0"/>
           </a:p>

--- a/it/slides/21-Architettura_dei_Calcolatori-Ingresso_Uscita-Codice.pptx
+++ b/it/slides/21-Architettura_dei_Calcolatori-Ingresso_Uscita-Codice.pptx
@@ -118,25 +118,25 @@
   <p:extLst>
     <p:ext uri="{521415D9-36F7-43E2-AB2F-B90AF26B5E84}">
       <p14:sectionLst xmlns:p14="http://schemas.microsoft.com/office/powerpoint/2010/main">
-        <p14:section name="Apertura" id="{f8f69b1a-0b7d-78b8-8fe2-4caf702b369a}">
+        <p14:section name="Apertura" id="{7080c3e5-2bd6-bcf0-cc4e-82e18daaa351}">
           <p14:sldIdLst>
             <p14:sldId id="256"/>
             <p14:sldId id="257"/>
           </p14:sldIdLst>
         </p14:section>
-        <p14:section name="Riscaldamento sulla macchina" id="{9075a6ab-7b44-8c9d-2a20-a0367bd7c378}">
+        <p14:section name="Riscaldamento sulla macchina" id="{f3f3bb91-ec1a-8706-0910-01e55f598a7c}">
           <p14:sldIdLst>
             <p14:sldId id="258"/>
           </p14:sldIdLst>
         </p14:section>
-        <p14:section name="Il programma completo" id="{04309fd7-e4e8-8385-d4ae-d1c65ccfa583}">
+        <p14:section name="Il programma completo" id="{a127a34e-558e-a229-8c5d-3268077295f8}">
           <p14:sldIdLst>
             <p14:sldId id="259"/>
             <p14:sldId id="260"/>
             <p14:sldId id="261"/>
           </p14:sldIdLst>
         </p14:section>
-        <p14:section name="Eseguire e provare" id="{760ad609-fbe3-0ee4-ab7d-43607a14d036}">
+        <p14:section name="Eseguire e provare" id="{b566ed72-e000-86d6-92c4-66c707501ed1}">
           <p14:sldIdLst>
             <p14:sldId id="262"/>
             <p14:sldId id="263"/>
@@ -145,7 +145,7 @@
             <p14:sldId id="266"/>
           </p14:sldIdLst>
         </p14:section>
-        <p14:section name="Esercizi" id="{e774bfe7-2bd2-c5b2-92de-2207d70e4e10}">
+        <p14:section name="Esercizi" id="{7b4f4317-cf93-3466-f632-ea77ea107df0}">
           <p14:sldIdLst>
             <p14:sldId id="267"/>
           </p14:sldIdLst>
